--- a/hmi/dev/pics/portrait.pptx
+++ b/hmi/dev/pics/portrait.pptx
@@ -6,11 +6,12 @@
   </p:sldMasterIdLst>
   <p:sldIdLst>
     <p:sldId id="264" r:id="rId2"/>
-    <p:sldId id="258" r:id="rId3"/>
-    <p:sldId id="265" r:id="rId4"/>
-    <p:sldId id="263" r:id="rId5"/>
-    <p:sldId id="260" r:id="rId6"/>
-    <p:sldId id="262" r:id="rId7"/>
+    <p:sldId id="266" r:id="rId3"/>
+    <p:sldId id="258" r:id="rId4"/>
+    <p:sldId id="265" r:id="rId5"/>
+    <p:sldId id="263" r:id="rId6"/>
+    <p:sldId id="260" r:id="rId7"/>
+    <p:sldId id="262" r:id="rId8"/>
   </p:sldIdLst>
   <p:sldSz cx="3048000" cy="4572000"/>
   <p:notesSz cx="6858000" cy="9144000"/>
@@ -502,7 +503,7 @@
           <a:p>
             <a:fld id="{024B8AE9-66EA-4D6A-A8A7-9C9BEADD6B50}" type="datetimeFigureOut">
               <a:rPr lang="en-SE" smtClean="0"/>
-              <a:t>2026-04-12</a:t>
+              <a:t>2026-05-26</a:t>
             </a:fld>
             <a:endParaRPr lang="en-SE"/>
           </a:p>
@@ -672,7 +673,7 @@
           <a:p>
             <a:fld id="{024B8AE9-66EA-4D6A-A8A7-9C9BEADD6B50}" type="datetimeFigureOut">
               <a:rPr lang="en-SE" smtClean="0"/>
-              <a:t>2026-04-12</a:t>
+              <a:t>2026-05-26</a:t>
             </a:fld>
             <a:endParaRPr lang="en-SE"/>
           </a:p>
@@ -852,7 +853,7 @@
           <a:p>
             <a:fld id="{024B8AE9-66EA-4D6A-A8A7-9C9BEADD6B50}" type="datetimeFigureOut">
               <a:rPr lang="en-SE" smtClean="0"/>
-              <a:t>2026-04-12</a:t>
+              <a:t>2026-05-26</a:t>
             </a:fld>
             <a:endParaRPr lang="en-SE"/>
           </a:p>
@@ -1022,7 +1023,7 @@
           <a:p>
             <a:fld id="{024B8AE9-66EA-4D6A-A8A7-9C9BEADD6B50}" type="datetimeFigureOut">
               <a:rPr lang="en-SE" smtClean="0"/>
-              <a:t>2026-04-12</a:t>
+              <a:t>2026-05-26</a:t>
             </a:fld>
             <a:endParaRPr lang="en-SE"/>
           </a:p>
@@ -1266,7 +1267,7 @@
           <a:p>
             <a:fld id="{024B8AE9-66EA-4D6A-A8A7-9C9BEADD6B50}" type="datetimeFigureOut">
               <a:rPr lang="en-SE" smtClean="0"/>
-              <a:t>2026-04-12</a:t>
+              <a:t>2026-05-26</a:t>
             </a:fld>
             <a:endParaRPr lang="en-SE"/>
           </a:p>
@@ -1498,7 +1499,7 @@
           <a:p>
             <a:fld id="{024B8AE9-66EA-4D6A-A8A7-9C9BEADD6B50}" type="datetimeFigureOut">
               <a:rPr lang="en-SE" smtClean="0"/>
-              <a:t>2026-04-12</a:t>
+              <a:t>2026-05-26</a:t>
             </a:fld>
             <a:endParaRPr lang="en-SE"/>
           </a:p>
@@ -1865,7 +1866,7 @@
           <a:p>
             <a:fld id="{024B8AE9-66EA-4D6A-A8A7-9C9BEADD6B50}" type="datetimeFigureOut">
               <a:rPr lang="en-SE" smtClean="0"/>
-              <a:t>2026-04-12</a:t>
+              <a:t>2026-05-26</a:t>
             </a:fld>
             <a:endParaRPr lang="en-SE"/>
           </a:p>
@@ -1983,7 +1984,7 @@
           <a:p>
             <a:fld id="{024B8AE9-66EA-4D6A-A8A7-9C9BEADD6B50}" type="datetimeFigureOut">
               <a:rPr lang="en-SE" smtClean="0"/>
-              <a:t>2026-04-12</a:t>
+              <a:t>2026-05-26</a:t>
             </a:fld>
             <a:endParaRPr lang="en-SE"/>
           </a:p>
@@ -2078,7 +2079,7 @@
           <a:p>
             <a:fld id="{024B8AE9-66EA-4D6A-A8A7-9C9BEADD6B50}" type="datetimeFigureOut">
               <a:rPr lang="en-SE" smtClean="0"/>
-              <a:t>2026-04-12</a:t>
+              <a:t>2026-05-26</a:t>
             </a:fld>
             <a:endParaRPr lang="en-SE"/>
           </a:p>
@@ -2355,7 +2356,7 @@
           <a:p>
             <a:fld id="{024B8AE9-66EA-4D6A-A8A7-9C9BEADD6B50}" type="datetimeFigureOut">
               <a:rPr lang="en-SE" smtClean="0"/>
-              <a:t>2026-04-12</a:t>
+              <a:t>2026-05-26</a:t>
             </a:fld>
             <a:endParaRPr lang="en-SE"/>
           </a:p>
@@ -2612,7 +2613,7 @@
           <a:p>
             <a:fld id="{024B8AE9-66EA-4D6A-A8A7-9C9BEADD6B50}" type="datetimeFigureOut">
               <a:rPr lang="en-SE" smtClean="0"/>
-              <a:t>2026-04-12</a:t>
+              <a:t>2026-05-26</a:t>
             </a:fld>
             <a:endParaRPr lang="en-SE"/>
           </a:p>
@@ -2825,7 +2826,7 @@
           <a:p>
             <a:fld id="{024B8AE9-66EA-4D6A-A8A7-9C9BEADD6B50}" type="datetimeFigureOut">
               <a:rPr lang="en-SE" smtClean="0"/>
-              <a:t>2026-04-12</a:t>
+              <a:t>2026-05-26</a:t>
             </a:fld>
             <a:endParaRPr lang="en-SE"/>
           </a:p>
@@ -3288,6 +3289,114 @@
 <file path=ppt/slides/slide2.xml><?xml version="1.0" encoding="utf-8"?>
 <p:sld xmlns:a="http://schemas.openxmlformats.org/drawingml/2006/main" xmlns:r="http://schemas.openxmlformats.org/officeDocument/2006/relationships" xmlns:p="http://schemas.openxmlformats.org/presentationml/2006/main">
   <p:cSld>
+    <p:bg>
+      <p:bgPr>
+        <a:solidFill>
+          <a:schemeClr val="tx1"/>
+        </a:solidFill>
+        <a:effectLst/>
+      </p:bgPr>
+    </p:bg>
+    <p:spTree>
+      <p:nvGrpSpPr>
+        <p:cNvPr id="1" name=""/>
+        <p:cNvGrpSpPr/>
+        <p:nvPr/>
+      </p:nvGrpSpPr>
+      <p:grpSpPr>
+        <a:xfrm>
+          <a:off x="0" y="0"/>
+          <a:ext cx="0" cy="0"/>
+          <a:chOff x="0" y="0"/>
+          <a:chExt cx="0" cy="0"/>
+        </a:xfrm>
+      </p:grpSpPr>
+      <p:sp>
+        <p:nvSpPr>
+          <p:cNvPr id="2" name="Flowchart: Connector 1">
+            <a:extLst>
+              <a:ext uri="{FF2B5EF4-FFF2-40B4-BE49-F238E27FC236}">
+                <a16:creationId xmlns:a16="http://schemas.microsoft.com/office/drawing/2014/main" id="{D9CA4FBC-91E7-BAB0-5AE4-E058DDE2F4FB}"/>
+              </a:ext>
+            </a:extLst>
+          </p:cNvPr>
+          <p:cNvSpPr/>
+          <p:nvPr/>
+        </p:nvSpPr>
+        <p:spPr>
+          <a:xfrm>
+            <a:off x="1524000" y="2286000"/>
+            <a:ext cx="4356016" cy="4118610"/>
+          </a:xfrm>
+          <a:prstGeom prst="flowChartConnector">
+            <a:avLst/>
+          </a:prstGeom>
+          <a:gradFill flip="none" rotWithShape="1">
+            <a:gsLst>
+              <a:gs pos="0">
+                <a:schemeClr val="tx1">
+                  <a:lumMod val="75000"/>
+                  <a:lumOff val="25000"/>
+                </a:schemeClr>
+              </a:gs>
+              <a:gs pos="100000">
+                <a:srgbClr val="020202"/>
+              </a:gs>
+            </a:gsLst>
+            <a:path path="circle">
+              <a:fillToRect l="100000" t="100000"/>
+            </a:path>
+            <a:tileRect r="-100000" b="-100000"/>
+          </a:gradFill>
+          <a:ln>
+            <a:solidFill>
+              <a:srgbClr val="3E3E3E">
+                <a:alpha val="50000"/>
+              </a:srgbClr>
+            </a:solidFill>
+          </a:ln>
+        </p:spPr>
+        <p:style>
+          <a:lnRef idx="2">
+            <a:schemeClr val="accent1">
+              <a:shade val="15000"/>
+            </a:schemeClr>
+          </a:lnRef>
+          <a:fillRef idx="1">
+            <a:schemeClr val="accent1"/>
+          </a:fillRef>
+          <a:effectRef idx="0">
+            <a:schemeClr val="accent1"/>
+          </a:effectRef>
+          <a:fontRef idx="minor">
+            <a:schemeClr val="lt1"/>
+          </a:fontRef>
+        </p:style>
+        <p:txBody>
+          <a:bodyPr rtlCol="0" anchor="ctr"/>
+          <a:lstStyle/>
+          <a:p>
+            <a:pPr algn="ctr"/>
+            <a:endParaRPr lang="en-SE"/>
+          </a:p>
+        </p:txBody>
+      </p:sp>
+    </p:spTree>
+    <p:extLst>
+      <p:ext uri="{BB962C8B-B14F-4D97-AF65-F5344CB8AC3E}">
+        <p14:creationId xmlns:p14="http://schemas.microsoft.com/office/powerpoint/2010/main" val="220351999"/>
+      </p:ext>
+    </p:extLst>
+  </p:cSld>
+  <p:clrMapOvr>
+    <a:masterClrMapping/>
+  </p:clrMapOvr>
+</p:sld>
+</file>
+
+<file path=ppt/slides/slide3.xml><?xml version="1.0" encoding="utf-8"?>
+<p:sld xmlns:a="http://schemas.openxmlformats.org/drawingml/2006/main" xmlns:r="http://schemas.openxmlformats.org/officeDocument/2006/relationships" xmlns:p="http://schemas.openxmlformats.org/presentationml/2006/main">
+  <p:cSld>
     <p:spTree>
       <p:nvGrpSpPr>
         <p:cNvPr id="1" name=""/>
@@ -3618,7 +3727,7 @@
 </p:sld>
 </file>
 
-<file path=ppt/slides/slide3.xml><?xml version="1.0" encoding="utf-8"?>
+<file path=ppt/slides/slide4.xml><?xml version="1.0" encoding="utf-8"?>
 <p:sld xmlns:a="http://schemas.openxmlformats.org/drawingml/2006/main" xmlns:r="http://schemas.openxmlformats.org/officeDocument/2006/relationships" xmlns:p="http://schemas.openxmlformats.org/presentationml/2006/main">
   <p:cSld>
     <p:spTree>
@@ -3828,190 +3937,6 @@
     <p:extLst>
       <p:ext uri="{BB962C8B-B14F-4D97-AF65-F5344CB8AC3E}">
         <p14:creationId xmlns:p14="http://schemas.microsoft.com/office/powerpoint/2010/main" val="4260299023"/>
-      </p:ext>
-    </p:extLst>
-  </p:cSld>
-  <p:clrMapOvr>
-    <a:masterClrMapping/>
-  </p:clrMapOvr>
-</p:sld>
-</file>
-
-<file path=ppt/slides/slide4.xml><?xml version="1.0" encoding="utf-8"?>
-<p:sld xmlns:a="http://schemas.openxmlformats.org/drawingml/2006/main" xmlns:r="http://schemas.openxmlformats.org/officeDocument/2006/relationships" xmlns:p="http://schemas.openxmlformats.org/presentationml/2006/main">
-  <p:cSld>
-    <p:spTree>
-      <p:nvGrpSpPr>
-        <p:cNvPr id="1" name=""/>
-        <p:cNvGrpSpPr/>
-        <p:nvPr/>
-      </p:nvGrpSpPr>
-      <p:grpSpPr>
-        <a:xfrm>
-          <a:off x="0" y="0"/>
-          <a:ext cx="0" cy="0"/>
-          <a:chOff x="0" y="0"/>
-          <a:chExt cx="0" cy="0"/>
-        </a:xfrm>
-      </p:grpSpPr>
-      <p:pic>
-        <p:nvPicPr>
-          <p:cNvPr id="4" name="Picture 3" descr="A colorful waves on a black background&#10;&#10;Description automatically generated">
-            <a:extLst>
-              <a:ext uri="{FF2B5EF4-FFF2-40B4-BE49-F238E27FC236}">
-                <a16:creationId xmlns:a16="http://schemas.microsoft.com/office/drawing/2014/main" id="{F086EAF8-13C6-23DD-1547-4E35A34A1D12}"/>
-              </a:ext>
-            </a:extLst>
-          </p:cNvPr>
-          <p:cNvPicPr>
-            <a:picLocks noChangeAspect="1"/>
-          </p:cNvPicPr>
-          <p:nvPr/>
-        </p:nvPicPr>
-        <p:blipFill>
-          <a:blip r:embed="rId2">
-            <a:extLst>
-              <a:ext uri="{28A0092B-C50C-407E-A947-70E740481C1C}">
-                <a14:useLocalDpi xmlns:a14="http://schemas.microsoft.com/office/drawing/2010/main" val="0"/>
-              </a:ext>
-            </a:extLst>
-          </a:blip>
-          <a:stretch>
-            <a:fillRect/>
-          </a:stretch>
-        </p:blipFill>
-        <p:spPr>
-          <a:xfrm>
-            <a:off x="0" y="0"/>
-            <a:ext cx="3048000" cy="4572000"/>
-          </a:xfrm>
-          <a:prstGeom prst="rect">
-            <a:avLst/>
-          </a:prstGeom>
-        </p:spPr>
-      </p:pic>
-      <p:pic>
-        <p:nvPicPr>
-          <p:cNvPr id="2" name="Picture 1" descr="A circle with a rainbow colored circle&#10;&#10;Description automatically generated with medium confidence">
-            <a:extLst>
-              <a:ext uri="{FF2B5EF4-FFF2-40B4-BE49-F238E27FC236}">
-                <a16:creationId xmlns:a16="http://schemas.microsoft.com/office/drawing/2014/main" id="{5B63B5A7-0D5D-1A71-435F-BB635A8BA282}"/>
-              </a:ext>
-            </a:extLst>
-          </p:cNvPr>
-          <p:cNvPicPr>
-            <a:picLocks noChangeAspect="1"/>
-          </p:cNvPicPr>
-          <p:nvPr/>
-        </p:nvPicPr>
-        <p:blipFill>
-          <a:blip r:embed="rId3">
-            <a:clrChange>
-              <a:clrFrom>
-                <a:srgbClr val="000000"/>
-              </a:clrFrom>
-              <a:clrTo>
-                <a:srgbClr val="000000">
-                  <a:alpha val="0"/>
-                </a:srgbClr>
-              </a:clrTo>
-            </a:clrChange>
-            <a:extLst>
-              <a:ext uri="{28A0092B-C50C-407E-A947-70E740481C1C}">
-                <a14:useLocalDpi xmlns:a14="http://schemas.microsoft.com/office/drawing/2010/main" val="0"/>
-              </a:ext>
-            </a:extLst>
-          </a:blip>
-          <a:stretch>
-            <a:fillRect/>
-          </a:stretch>
-        </p:blipFill>
-        <p:spPr>
-          <a:xfrm>
-            <a:off x="571367" y="2560647"/>
-            <a:ext cx="1905266" cy="1905266"/>
-          </a:xfrm>
-          <a:prstGeom prst="rect">
-            <a:avLst/>
-          </a:prstGeom>
-        </p:spPr>
-      </p:pic>
-      <p:pic>
-        <p:nvPicPr>
-          <p:cNvPr id="3" name="Picture 2" descr="A yellow and white gradient&#10;&#10;Description automatically generated">
-            <a:extLst>
-              <a:ext uri="{FF2B5EF4-FFF2-40B4-BE49-F238E27FC236}">
-                <a16:creationId xmlns:a16="http://schemas.microsoft.com/office/drawing/2014/main" id="{12D5DFD8-8037-C70D-A947-3C129F0541A0}"/>
-              </a:ext>
-            </a:extLst>
-          </p:cNvPr>
-          <p:cNvPicPr>
-            <a:picLocks noChangeAspect="1"/>
-          </p:cNvPicPr>
-          <p:nvPr/>
-        </p:nvPicPr>
-        <p:blipFill>
-          <a:blip r:embed="rId4">
-            <a:extLst>
-              <a:ext uri="{28A0092B-C50C-407E-A947-70E740481C1C}">
-                <a14:useLocalDpi xmlns:a14="http://schemas.microsoft.com/office/drawing/2010/main" val="0"/>
-              </a:ext>
-            </a:extLst>
-          </a:blip>
-          <a:stretch>
-            <a:fillRect/>
-          </a:stretch>
-        </p:blipFill>
-        <p:spPr>
-          <a:xfrm>
-            <a:off x="1667008" y="322272"/>
-            <a:ext cx="809625" cy="2238375"/>
-          </a:xfrm>
-          <a:prstGeom prst="rect">
-            <a:avLst/>
-          </a:prstGeom>
-        </p:spPr>
-      </p:pic>
-      <p:pic>
-        <p:nvPicPr>
-          <p:cNvPr id="5" name="Picture 4" descr="A blue and white background&#10;&#10;Description automatically generated">
-            <a:extLst>
-              <a:ext uri="{FF2B5EF4-FFF2-40B4-BE49-F238E27FC236}">
-                <a16:creationId xmlns:a16="http://schemas.microsoft.com/office/drawing/2014/main" id="{ACCA1889-0EFB-DEF8-D0DF-C32205ED2ACB}"/>
-              </a:ext>
-            </a:extLst>
-          </p:cNvPr>
-          <p:cNvPicPr>
-            <a:picLocks noChangeAspect="1"/>
-          </p:cNvPicPr>
-          <p:nvPr/>
-        </p:nvPicPr>
-        <p:blipFill>
-          <a:blip r:embed="rId5">
-            <a:extLst>
-              <a:ext uri="{28A0092B-C50C-407E-A947-70E740481C1C}">
-                <a14:useLocalDpi xmlns:a14="http://schemas.microsoft.com/office/drawing/2010/main" val="0"/>
-              </a:ext>
-            </a:extLst>
-          </a:blip>
-          <a:stretch>
-            <a:fillRect/>
-          </a:stretch>
-        </p:blipFill>
-        <p:spPr>
-          <a:xfrm>
-            <a:off x="584564" y="322272"/>
-            <a:ext cx="809738" cy="2238687"/>
-          </a:xfrm>
-          <a:prstGeom prst="rect">
-            <a:avLst/>
-          </a:prstGeom>
-        </p:spPr>
-      </p:pic>
-    </p:spTree>
-    <p:extLst>
-      <p:ext uri="{BB962C8B-B14F-4D97-AF65-F5344CB8AC3E}">
-        <p14:creationId xmlns:p14="http://schemas.microsoft.com/office/powerpoint/2010/main" val="1439606373"/>
       </p:ext>
     </p:extLst>
   </p:cSld>
@@ -4074,6 +3999,190 @@
           </a:prstGeom>
         </p:spPr>
       </p:pic>
+      <p:pic>
+        <p:nvPicPr>
+          <p:cNvPr id="2" name="Picture 1" descr="A circle with a rainbow colored circle&#10;&#10;Description automatically generated with medium confidence">
+            <a:extLst>
+              <a:ext uri="{FF2B5EF4-FFF2-40B4-BE49-F238E27FC236}">
+                <a16:creationId xmlns:a16="http://schemas.microsoft.com/office/drawing/2014/main" id="{5B63B5A7-0D5D-1A71-435F-BB635A8BA282}"/>
+              </a:ext>
+            </a:extLst>
+          </p:cNvPr>
+          <p:cNvPicPr>
+            <a:picLocks noChangeAspect="1"/>
+          </p:cNvPicPr>
+          <p:nvPr/>
+        </p:nvPicPr>
+        <p:blipFill>
+          <a:blip r:embed="rId3">
+            <a:clrChange>
+              <a:clrFrom>
+                <a:srgbClr val="000000"/>
+              </a:clrFrom>
+              <a:clrTo>
+                <a:srgbClr val="000000">
+                  <a:alpha val="0"/>
+                </a:srgbClr>
+              </a:clrTo>
+            </a:clrChange>
+            <a:extLst>
+              <a:ext uri="{28A0092B-C50C-407E-A947-70E740481C1C}">
+                <a14:useLocalDpi xmlns:a14="http://schemas.microsoft.com/office/drawing/2010/main" val="0"/>
+              </a:ext>
+            </a:extLst>
+          </a:blip>
+          <a:stretch>
+            <a:fillRect/>
+          </a:stretch>
+        </p:blipFill>
+        <p:spPr>
+          <a:xfrm>
+            <a:off x="571367" y="2560647"/>
+            <a:ext cx="1905266" cy="1905266"/>
+          </a:xfrm>
+          <a:prstGeom prst="rect">
+            <a:avLst/>
+          </a:prstGeom>
+        </p:spPr>
+      </p:pic>
+      <p:pic>
+        <p:nvPicPr>
+          <p:cNvPr id="3" name="Picture 2" descr="A yellow and white gradient&#10;&#10;Description automatically generated">
+            <a:extLst>
+              <a:ext uri="{FF2B5EF4-FFF2-40B4-BE49-F238E27FC236}">
+                <a16:creationId xmlns:a16="http://schemas.microsoft.com/office/drawing/2014/main" id="{12D5DFD8-8037-C70D-A947-3C129F0541A0}"/>
+              </a:ext>
+            </a:extLst>
+          </p:cNvPr>
+          <p:cNvPicPr>
+            <a:picLocks noChangeAspect="1"/>
+          </p:cNvPicPr>
+          <p:nvPr/>
+        </p:nvPicPr>
+        <p:blipFill>
+          <a:blip r:embed="rId4">
+            <a:extLst>
+              <a:ext uri="{28A0092B-C50C-407E-A947-70E740481C1C}">
+                <a14:useLocalDpi xmlns:a14="http://schemas.microsoft.com/office/drawing/2010/main" val="0"/>
+              </a:ext>
+            </a:extLst>
+          </a:blip>
+          <a:stretch>
+            <a:fillRect/>
+          </a:stretch>
+        </p:blipFill>
+        <p:spPr>
+          <a:xfrm>
+            <a:off x="1667008" y="322272"/>
+            <a:ext cx="809625" cy="2238375"/>
+          </a:xfrm>
+          <a:prstGeom prst="rect">
+            <a:avLst/>
+          </a:prstGeom>
+        </p:spPr>
+      </p:pic>
+      <p:pic>
+        <p:nvPicPr>
+          <p:cNvPr id="5" name="Picture 4" descr="A blue and white background&#10;&#10;Description automatically generated">
+            <a:extLst>
+              <a:ext uri="{FF2B5EF4-FFF2-40B4-BE49-F238E27FC236}">
+                <a16:creationId xmlns:a16="http://schemas.microsoft.com/office/drawing/2014/main" id="{ACCA1889-0EFB-DEF8-D0DF-C32205ED2ACB}"/>
+              </a:ext>
+            </a:extLst>
+          </p:cNvPr>
+          <p:cNvPicPr>
+            <a:picLocks noChangeAspect="1"/>
+          </p:cNvPicPr>
+          <p:nvPr/>
+        </p:nvPicPr>
+        <p:blipFill>
+          <a:blip r:embed="rId5">
+            <a:extLst>
+              <a:ext uri="{28A0092B-C50C-407E-A947-70E740481C1C}">
+                <a14:useLocalDpi xmlns:a14="http://schemas.microsoft.com/office/drawing/2010/main" val="0"/>
+              </a:ext>
+            </a:extLst>
+          </a:blip>
+          <a:stretch>
+            <a:fillRect/>
+          </a:stretch>
+        </p:blipFill>
+        <p:spPr>
+          <a:xfrm>
+            <a:off x="584564" y="322272"/>
+            <a:ext cx="809738" cy="2238687"/>
+          </a:xfrm>
+          <a:prstGeom prst="rect">
+            <a:avLst/>
+          </a:prstGeom>
+        </p:spPr>
+      </p:pic>
+    </p:spTree>
+    <p:extLst>
+      <p:ext uri="{BB962C8B-B14F-4D97-AF65-F5344CB8AC3E}">
+        <p14:creationId xmlns:p14="http://schemas.microsoft.com/office/powerpoint/2010/main" val="1439606373"/>
+      </p:ext>
+    </p:extLst>
+  </p:cSld>
+  <p:clrMapOvr>
+    <a:masterClrMapping/>
+  </p:clrMapOvr>
+</p:sld>
+</file>
+
+<file path=ppt/slides/slide6.xml><?xml version="1.0" encoding="utf-8"?>
+<p:sld xmlns:a="http://schemas.openxmlformats.org/drawingml/2006/main" xmlns:r="http://schemas.openxmlformats.org/officeDocument/2006/relationships" xmlns:p="http://schemas.openxmlformats.org/presentationml/2006/main">
+  <p:cSld>
+    <p:spTree>
+      <p:nvGrpSpPr>
+        <p:cNvPr id="1" name=""/>
+        <p:cNvGrpSpPr/>
+        <p:nvPr/>
+      </p:nvGrpSpPr>
+      <p:grpSpPr>
+        <a:xfrm>
+          <a:off x="0" y="0"/>
+          <a:ext cx="0" cy="0"/>
+          <a:chOff x="0" y="0"/>
+          <a:chExt cx="0" cy="0"/>
+        </a:xfrm>
+      </p:grpSpPr>
+      <p:pic>
+        <p:nvPicPr>
+          <p:cNvPr id="4" name="Picture 3" descr="A colorful waves on a black background&#10;&#10;Description automatically generated">
+            <a:extLst>
+              <a:ext uri="{FF2B5EF4-FFF2-40B4-BE49-F238E27FC236}">
+                <a16:creationId xmlns:a16="http://schemas.microsoft.com/office/drawing/2014/main" id="{F086EAF8-13C6-23DD-1547-4E35A34A1D12}"/>
+              </a:ext>
+            </a:extLst>
+          </p:cNvPr>
+          <p:cNvPicPr>
+            <a:picLocks noChangeAspect="1"/>
+          </p:cNvPicPr>
+          <p:nvPr/>
+        </p:nvPicPr>
+        <p:blipFill>
+          <a:blip r:embed="rId2">
+            <a:extLst>
+              <a:ext uri="{28A0092B-C50C-407E-A947-70E740481C1C}">
+                <a14:useLocalDpi xmlns:a14="http://schemas.microsoft.com/office/drawing/2010/main" val="0"/>
+              </a:ext>
+            </a:extLst>
+          </a:blip>
+          <a:stretch>
+            <a:fillRect/>
+          </a:stretch>
+        </p:blipFill>
+        <p:spPr>
+          <a:xfrm>
+            <a:off x="0" y="0"/>
+            <a:ext cx="3048000" cy="4572000"/>
+          </a:xfrm>
+          <a:prstGeom prst="rect">
+            <a:avLst/>
+          </a:prstGeom>
+        </p:spPr>
+      </p:pic>
       <p:sp>
         <p:nvSpPr>
           <p:cNvPr id="2" name="Rectangle: Rounded Corners 1">
@@ -4503,7 +4612,7 @@
 </p:sld>
 </file>
 
-<file path=ppt/slides/slide6.xml><?xml version="1.0" encoding="utf-8"?>
+<file path=ppt/slides/slide7.xml><?xml version="1.0" encoding="utf-8"?>
 <p:sld xmlns:a="http://schemas.openxmlformats.org/drawingml/2006/main" xmlns:r="http://schemas.openxmlformats.org/officeDocument/2006/relationships" xmlns:p="http://schemas.openxmlformats.org/presentationml/2006/main">
   <p:cSld>
     <p:spTree>
